--- a/sayt/media/resources/2026/10/mehnat-muhofazasi-12-mavzu.pptx
+++ b/sayt/media/resources/2026/10/mehnat-muhofazasi-12-mavzu.pptx
@@ -12795,7 +12795,7 @@
                 </a:solidFill>
                 <a:latin typeface="Georgia"/>
               </a:rPr>
-              <a:t>Shhvni kiyish va sozlash tartibi</a:t>
+              <a:t>SHHVni kiyish va sozlash tartibi</a:t>
             </a:r>
           </a:p>
         </p:txBody>
@@ -13223,7 +13223,7 @@
                 </a:solidFill>
                 <a:latin typeface="Georgia"/>
               </a:rPr>
-              <a:t>Yaroqsiz shhv bilan ishlashning xavflari</a:t>
+              <a:t>Yaroqsiz SHHV bilan ishlashning xavflari</a:t>
             </a:r>
           </a:p>
         </p:txBody>
